--- a/论文图片/图片转pdf/第二章/顶点坐标变换流程图.pptx
+++ b/论文图片/图片转pdf/第二章/顶点坐标变换流程图.pptx
@@ -2930,628 +2930,603 @@
         <p:nvPr/>
       </p:nvGrpSpPr>
       <p:grpSpPr/>
-      <p:grpSp>
-        <p:nvGrpSpPr>
-          <p:cNvPr id="4" name="组合 3"/>
-          <p:cNvGrpSpPr/>
+      <p:sp>
+        <p:nvSpPr>
+          <p:cNvPr id="5" name="矩形 4"/>
+          <p:cNvSpPr/>
           <p:nvPr/>
-        </p:nvGrpSpPr>
-        <p:grpSpPr>
+        </p:nvSpPr>
+        <p:spPr>
           <a:xfrm>
-            <a:off x="88180" y="117340"/>
-            <a:ext cx="10961952" cy="1877377"/>
-            <a:chOff x="626" y="2806"/>
-            <a:chExt cx="17260" cy="2956"/>
+            <a:off x="88265" y="117475"/>
+            <a:ext cx="10962005" cy="1877060"/>
           </a:xfrm>
-        </p:grpSpPr>
-        <p:sp>
-          <p:nvSpPr>
-            <p:cNvPr id="5" name="矩形 4"/>
-            <p:cNvSpPr/>
-            <p:nvPr/>
-          </p:nvSpPr>
-          <p:spPr>
-            <a:xfrm>
-              <a:off x="626" y="2806"/>
-              <a:ext cx="17260" cy="2956"/>
-            </a:xfrm>
-            <a:prstGeom prst="rect">
-              <a:avLst/>
-            </a:prstGeom>
+          <a:prstGeom prst="rect">
+            <a:avLst/>
+          </a:prstGeom>
+          <a:solidFill>
+            <a:srgbClr val="FBEDE0"/>
+          </a:solidFill>
+          <a:ln>
             <a:solidFill>
-              <a:srgbClr val="FBEDE0"/>
+              <a:schemeClr val="tx1"/>
             </a:solidFill>
-            <a:ln>
-              <a:solidFill>
-                <a:schemeClr val="tx1"/>
-              </a:solidFill>
-            </a:ln>
-          </p:spPr>
-          <p:style>
-            <a:lnRef idx="2">
-              <a:schemeClr val="accent1">
-                <a:lumMod val="75000"/>
-              </a:schemeClr>
-            </a:lnRef>
-            <a:fillRef idx="1">
-              <a:schemeClr val="accent1"/>
-            </a:fillRef>
-            <a:effectRef idx="0">
-              <a:srgbClr val="FFFFFF"/>
-            </a:effectRef>
-            <a:fontRef idx="minor">
-              <a:schemeClr val="lt1"/>
-            </a:fontRef>
-          </p:style>
-          <p:txBody>
-            <a:bodyPr rtlCol="0" anchor="ctr"/>
-            <a:p>
-              <a:pPr algn="ctr"/>
-              <a:endParaRPr lang="zh-CN" altLang="en-US" sz="1600"/>
-            </a:p>
-          </p:txBody>
-        </p:sp>
-        <p:sp>
-          <p:nvSpPr>
-            <p:cNvPr id="13" name="矩形 12"/>
-            <p:cNvSpPr/>
-            <p:nvPr/>
-          </p:nvSpPr>
-          <p:spPr>
-            <a:xfrm>
-              <a:off x="791" y="3170"/>
-              <a:ext cx="1951" cy="687"/>
-            </a:xfrm>
-            <a:prstGeom prst="rect">
-              <a:avLst/>
-            </a:prstGeom>
+          </a:ln>
+        </p:spPr>
+        <p:style>
+          <a:lnRef idx="2">
+            <a:schemeClr val="accent1">
+              <a:lumMod val="75000"/>
+            </a:schemeClr>
+          </a:lnRef>
+          <a:fillRef idx="1">
+            <a:schemeClr val="accent1"/>
+          </a:fillRef>
+          <a:effectRef idx="0">
+            <a:srgbClr val="FFFFFF"/>
+          </a:effectRef>
+          <a:fontRef idx="minor">
+            <a:schemeClr val="lt1"/>
+          </a:fontRef>
+        </p:style>
+        <p:txBody>
+          <a:bodyPr rtlCol="0" anchor="ctr"/>
+          <a:p>
+            <a:pPr algn="ctr"/>
+            <a:endParaRPr lang="zh-CN" altLang="en-US" sz="1600"/>
+          </a:p>
+        </p:txBody>
+      </p:sp>
+      <p:sp>
+        <p:nvSpPr>
+          <p:cNvPr id="13" name="矩形 12"/>
+          <p:cNvSpPr/>
+          <p:nvPr/>
+        </p:nvSpPr>
+        <p:spPr>
+          <a:xfrm>
+            <a:off x="193040" y="348615"/>
+            <a:ext cx="1238885" cy="436245"/>
+          </a:xfrm>
+          <a:prstGeom prst="rect">
+            <a:avLst/>
+          </a:prstGeom>
+          <a:solidFill>
+            <a:srgbClr val="F7CAAB"/>
+          </a:solidFill>
+          <a:ln>
             <a:solidFill>
-              <a:srgbClr val="F7CAAB"/>
+              <a:schemeClr val="tx1"/>
             </a:solidFill>
-            <a:ln>
-              <a:solidFill>
-                <a:schemeClr val="tx1"/>
-              </a:solidFill>
-            </a:ln>
-          </p:spPr>
-          <p:style>
-            <a:lnRef idx="2">
-              <a:schemeClr val="accent1">
-                <a:lumMod val="75000"/>
-              </a:schemeClr>
-            </a:lnRef>
-            <a:fillRef idx="1">
-              <a:schemeClr val="accent1"/>
-            </a:fillRef>
-            <a:effectRef idx="0">
-              <a:srgbClr val="FFFFFF"/>
-            </a:effectRef>
-            <a:fontRef idx="minor">
-              <a:schemeClr val="lt1"/>
-            </a:fontRef>
-          </p:style>
-          <p:txBody>
-            <a:bodyPr rtlCol="0" anchor="ctr"/>
-            <a:p>
-              <a:pPr algn="ctr"/>
-              <a:r>
-                <a:rPr lang="zh-CN" altLang="en-US" sz="1600" b="1">
-                  <a:solidFill>
-                    <a:schemeClr val="tx1"/>
-                  </a:solidFill>
-                  <a:latin typeface="宋体" panose="02010600030101010101" pitchFamily="2" charset="-122"/>
-                  <a:ea typeface="宋体" panose="02010600030101010101" pitchFamily="2" charset="-122"/>
-                  <a:cs typeface="宋体" panose="02010600030101010101" pitchFamily="2" charset="-122"/>
-                </a:rPr>
-                <a:t>模型空间</a:t>
-              </a:r>
-              <a:endParaRPr lang="zh-CN" altLang="en-US" sz="1600" b="1">
+          </a:ln>
+        </p:spPr>
+        <p:style>
+          <a:lnRef idx="2">
+            <a:schemeClr val="accent1">
+              <a:lumMod val="75000"/>
+            </a:schemeClr>
+          </a:lnRef>
+          <a:fillRef idx="1">
+            <a:schemeClr val="accent1"/>
+          </a:fillRef>
+          <a:effectRef idx="0">
+            <a:srgbClr val="FFFFFF"/>
+          </a:effectRef>
+          <a:fontRef idx="minor">
+            <a:schemeClr val="lt1"/>
+          </a:fontRef>
+        </p:style>
+        <p:txBody>
+          <a:bodyPr rtlCol="0" anchor="ctr"/>
+          <a:p>
+            <a:pPr algn="ctr"/>
+            <a:r>
+              <a:rPr lang="zh-CN" altLang="en-US" sz="1600">
                 <a:solidFill>
                   <a:schemeClr val="tx1"/>
                 </a:solidFill>
                 <a:latin typeface="宋体" panose="02010600030101010101" pitchFamily="2" charset="-122"/>
                 <a:ea typeface="宋体" panose="02010600030101010101" pitchFamily="2" charset="-122"/>
                 <a:cs typeface="宋体" panose="02010600030101010101" pitchFamily="2" charset="-122"/>
-              </a:endParaRPr>
-            </a:p>
-          </p:txBody>
-        </p:sp>
-        <p:sp>
-          <p:nvSpPr>
-            <p:cNvPr id="7" name="矩形 6"/>
-            <p:cNvSpPr/>
-            <p:nvPr/>
-          </p:nvSpPr>
-          <p:spPr>
-            <a:xfrm>
-              <a:off x="4345" y="3170"/>
-              <a:ext cx="1951" cy="687"/>
-            </a:xfrm>
-            <a:prstGeom prst="rect">
-              <a:avLst/>
-            </a:prstGeom>
-            <a:solidFill>
-              <a:srgbClr val="F7CAAB"/>
-            </a:solidFill>
-            <a:ln>
+              </a:rPr>
+              <a:t>模型空间</a:t>
+            </a:r>
+            <a:endParaRPr lang="zh-CN" altLang="en-US" sz="1600">
               <a:solidFill>
                 <a:schemeClr val="tx1"/>
               </a:solidFill>
-            </a:ln>
-          </p:spPr>
-          <p:style>
-            <a:lnRef idx="2">
-              <a:schemeClr val="accent1">
-                <a:lumMod val="75000"/>
-              </a:schemeClr>
-            </a:lnRef>
-            <a:fillRef idx="1">
-              <a:schemeClr val="accent1"/>
-            </a:fillRef>
-            <a:effectRef idx="0">
-              <a:srgbClr val="FFFFFF"/>
-            </a:effectRef>
-            <a:fontRef idx="minor">
-              <a:schemeClr val="lt1"/>
-            </a:fontRef>
-          </p:style>
-          <p:txBody>
-            <a:bodyPr rtlCol="0" anchor="ctr"/>
-            <a:p>
-              <a:pPr algn="ctr"/>
-              <a:r>
-                <a:rPr lang="zh-CN" altLang="en-US" sz="1600" b="1">
-                  <a:solidFill>
-                    <a:schemeClr val="tx1"/>
-                  </a:solidFill>
-                  <a:latin typeface="宋体" panose="02010600030101010101" pitchFamily="2" charset="-122"/>
-                  <a:ea typeface="宋体" panose="02010600030101010101" pitchFamily="2" charset="-122"/>
-                  <a:cs typeface="宋体" panose="02010600030101010101" pitchFamily="2" charset="-122"/>
-                </a:rPr>
-                <a:t>世界空间</a:t>
-              </a:r>
-              <a:endParaRPr lang="zh-CN" altLang="en-US" sz="1600" b="1">
+              <a:latin typeface="宋体" panose="02010600030101010101" pitchFamily="2" charset="-122"/>
+              <a:ea typeface="宋体" panose="02010600030101010101" pitchFamily="2" charset="-122"/>
+              <a:cs typeface="宋体" panose="02010600030101010101" pitchFamily="2" charset="-122"/>
+            </a:endParaRPr>
+          </a:p>
+        </p:txBody>
+      </p:sp>
+      <p:sp>
+        <p:nvSpPr>
+          <p:cNvPr id="7" name="矩形 6"/>
+          <p:cNvSpPr/>
+          <p:nvPr/>
+        </p:nvSpPr>
+        <p:spPr>
+          <a:xfrm>
+            <a:off x="2449830" y="348615"/>
+            <a:ext cx="1238885" cy="436245"/>
+          </a:xfrm>
+          <a:prstGeom prst="rect">
+            <a:avLst/>
+          </a:prstGeom>
+          <a:solidFill>
+            <a:srgbClr val="F7CAAB"/>
+          </a:solidFill>
+          <a:ln>
+            <a:solidFill>
+              <a:schemeClr val="tx1"/>
+            </a:solidFill>
+          </a:ln>
+        </p:spPr>
+        <p:style>
+          <a:lnRef idx="2">
+            <a:schemeClr val="accent1">
+              <a:lumMod val="75000"/>
+            </a:schemeClr>
+          </a:lnRef>
+          <a:fillRef idx="1">
+            <a:schemeClr val="accent1"/>
+          </a:fillRef>
+          <a:effectRef idx="0">
+            <a:srgbClr val="FFFFFF"/>
+          </a:effectRef>
+          <a:fontRef idx="minor">
+            <a:schemeClr val="lt1"/>
+          </a:fontRef>
+        </p:style>
+        <p:txBody>
+          <a:bodyPr rtlCol="0" anchor="ctr"/>
+          <a:p>
+            <a:pPr algn="ctr"/>
+            <a:r>
+              <a:rPr lang="zh-CN" altLang="en-US" sz="1600">
                 <a:solidFill>
                   <a:schemeClr val="tx1"/>
                 </a:solidFill>
                 <a:latin typeface="宋体" panose="02010600030101010101" pitchFamily="2" charset="-122"/>
                 <a:ea typeface="宋体" panose="02010600030101010101" pitchFamily="2" charset="-122"/>
                 <a:cs typeface="宋体" panose="02010600030101010101" pitchFamily="2" charset="-122"/>
-              </a:endParaRPr>
-            </a:p>
-          </p:txBody>
-        </p:sp>
-        <p:cxnSp>
-          <p:nvCxnSpPr>
-            <p:cNvPr id="17" name="直接箭头连接符 16"/>
-            <p:cNvCxnSpPr>
-              <a:stCxn id="13" idx="3"/>
-              <a:endCxn id="7" idx="1"/>
-            </p:cNvCxnSpPr>
-            <p:nvPr/>
-          </p:nvCxnSpPr>
-          <p:spPr>
-            <a:xfrm>
-              <a:off x="2742" y="3514"/>
-              <a:ext cx="1603" cy="0"/>
-            </a:xfrm>
-            <a:prstGeom prst="straightConnector1">
-              <a:avLst/>
-            </a:prstGeom>
-            <a:ln w="19050">
+              </a:rPr>
+              <a:t>世界空间</a:t>
+            </a:r>
+            <a:endParaRPr lang="zh-CN" altLang="en-US" sz="1600">
               <a:solidFill>
                 <a:schemeClr val="tx1"/>
               </a:solidFill>
-              <a:headEnd type="none"/>
-              <a:tailEnd type="triangle" w="med" len="med"/>
-            </a:ln>
-          </p:spPr>
-          <p:style>
-            <a:lnRef idx="2">
-              <a:schemeClr val="accent1"/>
-            </a:lnRef>
-            <a:fillRef idx="0">
-              <a:srgbClr val="FFFFFF"/>
-            </a:fillRef>
-            <a:effectRef idx="0">
-              <a:srgbClr val="FFFFFF"/>
-            </a:effectRef>
-            <a:fontRef idx="minor">
+              <a:latin typeface="宋体" panose="02010600030101010101" pitchFamily="2" charset="-122"/>
+              <a:ea typeface="宋体" panose="02010600030101010101" pitchFamily="2" charset="-122"/>
+              <a:cs typeface="宋体" panose="02010600030101010101" pitchFamily="2" charset="-122"/>
+            </a:endParaRPr>
+          </a:p>
+        </p:txBody>
+      </p:sp>
+      <p:cxnSp>
+        <p:nvCxnSpPr>
+          <p:cNvPr id="17" name="直接箭头连接符 16"/>
+          <p:cNvCxnSpPr>
+            <a:stCxn id="13" idx="3"/>
+            <a:endCxn id="7" idx="1"/>
+          </p:cNvCxnSpPr>
+          <p:nvPr/>
+        </p:nvCxnSpPr>
+        <p:spPr>
+          <a:xfrm>
+            <a:off x="1431925" y="567055"/>
+            <a:ext cx="1017905" cy="0"/>
+          </a:xfrm>
+          <a:prstGeom prst="straightConnector1">
+            <a:avLst/>
+          </a:prstGeom>
+          <a:ln w="19050">
+            <a:solidFill>
               <a:schemeClr val="tx1"/>
-            </a:fontRef>
-          </p:style>
-        </p:cxnSp>
-        <p:sp>
-          <p:nvSpPr>
-            <p:cNvPr id="6" name="文本框 5"/>
-            <p:cNvSpPr txBox="1"/>
-            <p:nvPr/>
-          </p:nvSpPr>
-          <p:spPr>
-            <a:xfrm>
-              <a:off x="2742" y="3031"/>
-              <a:ext cx="1855" cy="531"/>
-            </a:xfrm>
-            <a:prstGeom prst="rect">
-              <a:avLst/>
-            </a:prstGeom>
-            <a:noFill/>
-          </p:spPr>
-          <p:txBody>
-            <a:bodyPr wrap="square" rtlCol="0">
-              <a:spAutoFit/>
-            </a:bodyPr>
-            <a:p>
-              <a:r>
-                <a:rPr lang="zh-CN" altLang="en-US" sz="1600" b="1">
-                  <a:solidFill>
-                    <a:schemeClr val="tx1"/>
-                  </a:solidFill>
-                  <a:latin typeface="宋体" panose="02010600030101010101" pitchFamily="2" charset="-122"/>
-                  <a:ea typeface="宋体" panose="02010600030101010101" pitchFamily="2" charset="-122"/>
-                  <a:sym typeface="+mn-ea"/>
-                </a:rPr>
-                <a:t>模型变换</a:t>
-              </a:r>
-              <a:endParaRPr lang="zh-CN" altLang="en-US" sz="1600" b="1">
+            </a:solidFill>
+            <a:headEnd type="none"/>
+            <a:tailEnd type="triangle" w="med" len="med"/>
+          </a:ln>
+        </p:spPr>
+        <p:style>
+          <a:lnRef idx="2">
+            <a:schemeClr val="accent1"/>
+          </a:lnRef>
+          <a:fillRef idx="0">
+            <a:srgbClr val="FFFFFF"/>
+          </a:fillRef>
+          <a:effectRef idx="0">
+            <a:srgbClr val="FFFFFF"/>
+          </a:effectRef>
+          <a:fontRef idx="minor">
+            <a:schemeClr val="tx1"/>
+          </a:fontRef>
+        </p:style>
+      </p:cxnSp>
+      <p:sp>
+        <p:nvSpPr>
+          <p:cNvPr id="6" name="文本框 5"/>
+          <p:cNvSpPr txBox="1"/>
+          <p:nvPr/>
+        </p:nvSpPr>
+        <p:spPr>
+          <a:xfrm>
+            <a:off x="1431925" y="260350"/>
+            <a:ext cx="1177925" cy="337185"/>
+          </a:xfrm>
+          <a:prstGeom prst="rect">
+            <a:avLst/>
+          </a:prstGeom>
+          <a:noFill/>
+        </p:spPr>
+        <p:txBody>
+          <a:bodyPr wrap="square" rtlCol="0">
+            <a:spAutoFit/>
+          </a:bodyPr>
+          <a:p>
+            <a:r>
+              <a:rPr lang="zh-CN" altLang="en-US" sz="1600">
                 <a:solidFill>
                   <a:schemeClr val="tx1"/>
                 </a:solidFill>
                 <a:latin typeface="宋体" panose="02010600030101010101" pitchFamily="2" charset="-122"/>
                 <a:ea typeface="宋体" panose="02010600030101010101" pitchFamily="2" charset="-122"/>
                 <a:sym typeface="+mn-ea"/>
-              </a:endParaRPr>
-            </a:p>
-          </p:txBody>
-        </p:sp>
-        <p:sp>
-          <p:nvSpPr>
-            <p:cNvPr id="10" name="矩形 9"/>
-            <p:cNvSpPr/>
-            <p:nvPr/>
-          </p:nvSpPr>
-          <p:spPr>
-            <a:xfrm>
-              <a:off x="7911" y="3170"/>
-              <a:ext cx="1951" cy="687"/>
-            </a:xfrm>
-            <a:prstGeom prst="rect">
-              <a:avLst/>
-            </a:prstGeom>
-            <a:solidFill>
-              <a:srgbClr val="F7CAAB"/>
-            </a:solidFill>
-            <a:ln>
+              </a:rPr>
+              <a:t>模型变换</a:t>
+            </a:r>
+            <a:endParaRPr lang="zh-CN" altLang="en-US" sz="1600">
               <a:solidFill>
                 <a:schemeClr val="tx1"/>
               </a:solidFill>
-            </a:ln>
-          </p:spPr>
-          <p:style>
-            <a:lnRef idx="2">
-              <a:schemeClr val="accent1">
-                <a:lumMod val="75000"/>
-              </a:schemeClr>
-            </a:lnRef>
-            <a:fillRef idx="1">
-              <a:schemeClr val="accent1"/>
-            </a:fillRef>
-            <a:effectRef idx="0">
-              <a:srgbClr val="FFFFFF"/>
-            </a:effectRef>
-            <a:fontRef idx="minor">
-              <a:schemeClr val="lt1"/>
-            </a:fontRef>
-          </p:style>
-          <p:txBody>
-            <a:bodyPr rtlCol="0" anchor="ctr"/>
-            <a:p>
-              <a:pPr algn="ctr"/>
-              <a:r>
-                <a:rPr lang="zh-CN" altLang="en-US" sz="1600" b="1">
-                  <a:solidFill>
-                    <a:schemeClr val="tx1"/>
-                  </a:solidFill>
-                  <a:latin typeface="宋体" panose="02010600030101010101" pitchFamily="2" charset="-122"/>
-                  <a:ea typeface="宋体" panose="02010600030101010101" pitchFamily="2" charset="-122"/>
-                  <a:cs typeface="宋体" panose="02010600030101010101" pitchFamily="2" charset="-122"/>
-                </a:rPr>
-                <a:t>观察空间</a:t>
-              </a:r>
-              <a:endParaRPr lang="zh-CN" altLang="en-US" sz="1600" b="1">
+              <a:latin typeface="宋体" panose="02010600030101010101" pitchFamily="2" charset="-122"/>
+              <a:ea typeface="宋体" panose="02010600030101010101" pitchFamily="2" charset="-122"/>
+              <a:sym typeface="+mn-ea"/>
+            </a:endParaRPr>
+          </a:p>
+        </p:txBody>
+      </p:sp>
+      <p:sp>
+        <p:nvSpPr>
+          <p:cNvPr id="10" name="矩形 9"/>
+          <p:cNvSpPr/>
+          <p:nvPr/>
+        </p:nvSpPr>
+        <p:spPr>
+          <a:xfrm>
+            <a:off x="4714875" y="348615"/>
+            <a:ext cx="1238885" cy="436245"/>
+          </a:xfrm>
+          <a:prstGeom prst="rect">
+            <a:avLst/>
+          </a:prstGeom>
+          <a:solidFill>
+            <a:srgbClr val="F7CAAB"/>
+          </a:solidFill>
+          <a:ln>
+            <a:solidFill>
+              <a:schemeClr val="tx1"/>
+            </a:solidFill>
+          </a:ln>
+        </p:spPr>
+        <p:style>
+          <a:lnRef idx="2">
+            <a:schemeClr val="accent1">
+              <a:lumMod val="75000"/>
+            </a:schemeClr>
+          </a:lnRef>
+          <a:fillRef idx="1">
+            <a:schemeClr val="accent1"/>
+          </a:fillRef>
+          <a:effectRef idx="0">
+            <a:srgbClr val="FFFFFF"/>
+          </a:effectRef>
+          <a:fontRef idx="minor">
+            <a:schemeClr val="lt1"/>
+          </a:fontRef>
+        </p:style>
+        <p:txBody>
+          <a:bodyPr rtlCol="0" anchor="ctr"/>
+          <a:p>
+            <a:pPr algn="ctr"/>
+            <a:r>
+              <a:rPr lang="zh-CN" altLang="en-US" sz="1600">
                 <a:solidFill>
                   <a:schemeClr val="tx1"/>
                 </a:solidFill>
                 <a:latin typeface="宋体" panose="02010600030101010101" pitchFamily="2" charset="-122"/>
                 <a:ea typeface="宋体" panose="02010600030101010101" pitchFamily="2" charset="-122"/>
                 <a:cs typeface="宋体" panose="02010600030101010101" pitchFamily="2" charset="-122"/>
-              </a:endParaRPr>
-            </a:p>
-          </p:txBody>
-        </p:sp>
-        <p:cxnSp>
-          <p:nvCxnSpPr>
-            <p:cNvPr id="11" name="直接箭头连接符 10"/>
-            <p:cNvCxnSpPr>
-              <a:endCxn id="10" idx="1"/>
-            </p:cNvCxnSpPr>
-            <p:nvPr/>
-          </p:nvCxnSpPr>
-          <p:spPr>
-            <a:xfrm>
-              <a:off x="6308" y="3514"/>
-              <a:ext cx="1603" cy="0"/>
-            </a:xfrm>
-            <a:prstGeom prst="straightConnector1">
-              <a:avLst/>
-            </a:prstGeom>
-            <a:ln w="19050">
+              </a:rPr>
+              <a:t>观察空间</a:t>
+            </a:r>
+            <a:endParaRPr lang="zh-CN" altLang="en-US" sz="1600">
               <a:solidFill>
                 <a:schemeClr val="tx1"/>
               </a:solidFill>
-              <a:headEnd type="none"/>
-              <a:tailEnd type="triangle" w="med" len="med"/>
-            </a:ln>
-          </p:spPr>
-          <p:style>
-            <a:lnRef idx="2">
-              <a:schemeClr val="accent1"/>
-            </a:lnRef>
-            <a:fillRef idx="0">
-              <a:srgbClr val="FFFFFF"/>
-            </a:fillRef>
-            <a:effectRef idx="0">
-              <a:srgbClr val="FFFFFF"/>
-            </a:effectRef>
-            <a:fontRef idx="minor">
+              <a:latin typeface="宋体" panose="02010600030101010101" pitchFamily="2" charset="-122"/>
+              <a:ea typeface="宋体" panose="02010600030101010101" pitchFamily="2" charset="-122"/>
+              <a:cs typeface="宋体" panose="02010600030101010101" pitchFamily="2" charset="-122"/>
+            </a:endParaRPr>
+          </a:p>
+        </p:txBody>
+      </p:sp>
+      <p:cxnSp>
+        <p:nvCxnSpPr>
+          <p:cNvPr id="11" name="直接箭头连接符 10"/>
+          <p:cNvCxnSpPr>
+            <a:endCxn id="10" idx="1"/>
+          </p:cNvCxnSpPr>
+          <p:nvPr/>
+        </p:nvCxnSpPr>
+        <p:spPr>
+          <a:xfrm>
+            <a:off x="3696970" y="567055"/>
+            <a:ext cx="1017905" cy="0"/>
+          </a:xfrm>
+          <a:prstGeom prst="straightConnector1">
+            <a:avLst/>
+          </a:prstGeom>
+          <a:ln w="19050">
+            <a:solidFill>
               <a:schemeClr val="tx1"/>
-            </a:fontRef>
-          </p:style>
-        </p:cxnSp>
-        <p:sp>
-          <p:nvSpPr>
-            <p:cNvPr id="12" name="文本框 11"/>
-            <p:cNvSpPr txBox="1"/>
-            <p:nvPr/>
-          </p:nvSpPr>
-          <p:spPr>
-            <a:xfrm>
-              <a:off x="6304" y="3031"/>
-              <a:ext cx="1855" cy="531"/>
-            </a:xfrm>
-            <a:prstGeom prst="rect">
-              <a:avLst/>
-            </a:prstGeom>
-            <a:noFill/>
-          </p:spPr>
-          <p:txBody>
-            <a:bodyPr wrap="square" rtlCol="0">
-              <a:spAutoFit/>
-            </a:bodyPr>
-            <a:p>
-              <a:r>
-                <a:rPr lang="zh-CN" altLang="en-US" sz="1600" b="1">
-                  <a:solidFill>
-                    <a:schemeClr val="tx1"/>
-                  </a:solidFill>
-                  <a:latin typeface="宋体" panose="02010600030101010101" pitchFamily="2" charset="-122"/>
-                  <a:ea typeface="宋体" panose="02010600030101010101" pitchFamily="2" charset="-122"/>
-                  <a:sym typeface="+mn-ea"/>
-                </a:rPr>
-                <a:t>视图变换</a:t>
-              </a:r>
-              <a:endParaRPr lang="zh-CN" altLang="en-US" sz="1600" b="1">
+            </a:solidFill>
+            <a:headEnd type="none"/>
+            <a:tailEnd type="triangle" w="med" len="med"/>
+          </a:ln>
+        </p:spPr>
+        <p:style>
+          <a:lnRef idx="2">
+            <a:schemeClr val="accent1"/>
+          </a:lnRef>
+          <a:fillRef idx="0">
+            <a:srgbClr val="FFFFFF"/>
+          </a:fillRef>
+          <a:effectRef idx="0">
+            <a:srgbClr val="FFFFFF"/>
+          </a:effectRef>
+          <a:fontRef idx="minor">
+            <a:schemeClr val="tx1"/>
+          </a:fontRef>
+        </p:style>
+      </p:cxnSp>
+      <p:sp>
+        <p:nvSpPr>
+          <p:cNvPr id="12" name="文本框 11"/>
+          <p:cNvSpPr txBox="1"/>
+          <p:nvPr/>
+        </p:nvSpPr>
+        <p:spPr>
+          <a:xfrm>
+            <a:off x="3694430" y="260350"/>
+            <a:ext cx="1177925" cy="337185"/>
+          </a:xfrm>
+          <a:prstGeom prst="rect">
+            <a:avLst/>
+          </a:prstGeom>
+          <a:noFill/>
+        </p:spPr>
+        <p:txBody>
+          <a:bodyPr wrap="square" rtlCol="0">
+            <a:spAutoFit/>
+          </a:bodyPr>
+          <a:p>
+            <a:r>
+              <a:rPr lang="zh-CN" altLang="en-US" sz="1600">
                 <a:solidFill>
                   <a:schemeClr val="tx1"/>
                 </a:solidFill>
                 <a:latin typeface="宋体" panose="02010600030101010101" pitchFamily="2" charset="-122"/>
                 <a:ea typeface="宋体" panose="02010600030101010101" pitchFamily="2" charset="-122"/>
                 <a:sym typeface="+mn-ea"/>
-              </a:endParaRPr>
-            </a:p>
-          </p:txBody>
-        </p:sp>
-        <p:sp>
-          <p:nvSpPr>
-            <p:cNvPr id="19" name="矩形 18"/>
-            <p:cNvSpPr/>
-            <p:nvPr/>
-          </p:nvSpPr>
-          <p:spPr>
-            <a:xfrm>
-              <a:off x="11477" y="3170"/>
-              <a:ext cx="2250" cy="687"/>
-            </a:xfrm>
-            <a:prstGeom prst="rect">
-              <a:avLst/>
-            </a:prstGeom>
-            <a:solidFill>
-              <a:srgbClr val="F7CAAB"/>
-            </a:solidFill>
-            <a:ln>
+              </a:rPr>
+              <a:t>视图变换</a:t>
+            </a:r>
+            <a:endParaRPr lang="zh-CN" altLang="en-US" sz="1600">
               <a:solidFill>
                 <a:schemeClr val="tx1"/>
               </a:solidFill>
-            </a:ln>
-          </p:spPr>
-          <p:style>
-            <a:lnRef idx="2">
-              <a:schemeClr val="accent1">
-                <a:lumMod val="75000"/>
-              </a:schemeClr>
-            </a:lnRef>
-            <a:fillRef idx="1">
-              <a:schemeClr val="accent1"/>
-            </a:fillRef>
-            <a:effectRef idx="0">
-              <a:srgbClr val="FFFFFF"/>
-            </a:effectRef>
-            <a:fontRef idx="minor">
-              <a:schemeClr val="lt1"/>
-            </a:fontRef>
-          </p:style>
-          <p:txBody>
-            <a:bodyPr rtlCol="0" anchor="ctr"/>
-            <a:p>
-              <a:pPr algn="ctr"/>
-              <a:r>
-                <a:rPr lang="zh-CN" altLang="en-US" sz="1600" b="1">
-                  <a:solidFill>
-                    <a:schemeClr val="tx1"/>
-                  </a:solidFill>
-                  <a:latin typeface="宋体" panose="02010600030101010101" pitchFamily="2" charset="-122"/>
-                  <a:ea typeface="宋体" panose="02010600030101010101" pitchFamily="2" charset="-122"/>
-                  <a:cs typeface="宋体" panose="02010600030101010101" pitchFamily="2" charset="-122"/>
-                </a:rPr>
-                <a:t>齐次裁剪空间</a:t>
-              </a:r>
-              <a:endParaRPr lang="zh-CN" altLang="en-US" sz="1600" b="1">
+              <a:latin typeface="宋体" panose="02010600030101010101" pitchFamily="2" charset="-122"/>
+              <a:ea typeface="宋体" panose="02010600030101010101" pitchFamily="2" charset="-122"/>
+              <a:sym typeface="+mn-ea"/>
+            </a:endParaRPr>
+          </a:p>
+        </p:txBody>
+      </p:sp>
+      <p:sp>
+        <p:nvSpPr>
+          <p:cNvPr id="19" name="矩形 18"/>
+          <p:cNvSpPr/>
+          <p:nvPr/>
+        </p:nvSpPr>
+        <p:spPr>
+          <a:xfrm>
+            <a:off x="6979920" y="348615"/>
+            <a:ext cx="1428750" cy="436245"/>
+          </a:xfrm>
+          <a:prstGeom prst="rect">
+            <a:avLst/>
+          </a:prstGeom>
+          <a:solidFill>
+            <a:srgbClr val="F7CAAB"/>
+          </a:solidFill>
+          <a:ln>
+            <a:solidFill>
+              <a:schemeClr val="tx1"/>
+            </a:solidFill>
+          </a:ln>
+        </p:spPr>
+        <p:style>
+          <a:lnRef idx="2">
+            <a:schemeClr val="accent1">
+              <a:lumMod val="75000"/>
+            </a:schemeClr>
+          </a:lnRef>
+          <a:fillRef idx="1">
+            <a:schemeClr val="accent1"/>
+          </a:fillRef>
+          <a:effectRef idx="0">
+            <a:srgbClr val="FFFFFF"/>
+          </a:effectRef>
+          <a:fontRef idx="minor">
+            <a:schemeClr val="lt1"/>
+          </a:fontRef>
+        </p:style>
+        <p:txBody>
+          <a:bodyPr rtlCol="0" anchor="ctr"/>
+          <a:p>
+            <a:pPr algn="ctr"/>
+            <a:r>
+              <a:rPr lang="zh-CN" altLang="en-US" sz="1600">
                 <a:solidFill>
                   <a:schemeClr val="tx1"/>
                 </a:solidFill>
                 <a:latin typeface="宋体" panose="02010600030101010101" pitchFamily="2" charset="-122"/>
                 <a:ea typeface="宋体" panose="02010600030101010101" pitchFamily="2" charset="-122"/>
                 <a:cs typeface="宋体" panose="02010600030101010101" pitchFamily="2" charset="-122"/>
-              </a:endParaRPr>
-            </a:p>
-          </p:txBody>
-        </p:sp>
-        <p:cxnSp>
-          <p:nvCxnSpPr>
-            <p:cNvPr id="21" name="直接箭头连接符 20"/>
-            <p:cNvCxnSpPr/>
-            <p:nvPr/>
-          </p:nvCxnSpPr>
-          <p:spPr>
-            <a:xfrm>
-              <a:off x="9862" y="3514"/>
-              <a:ext cx="1603" cy="0"/>
-            </a:xfrm>
-            <a:prstGeom prst="straightConnector1">
-              <a:avLst/>
-            </a:prstGeom>
-            <a:ln w="19050">
+              </a:rPr>
+              <a:t>齐次裁剪空间</a:t>
+            </a:r>
+            <a:endParaRPr lang="zh-CN" altLang="en-US" sz="1600">
               <a:solidFill>
                 <a:schemeClr val="tx1"/>
               </a:solidFill>
-              <a:headEnd type="none"/>
-              <a:tailEnd type="triangle" w="med" len="med"/>
-            </a:ln>
-          </p:spPr>
-          <p:style>
-            <a:lnRef idx="2">
-              <a:schemeClr val="accent1"/>
-            </a:lnRef>
-            <a:fillRef idx="0">
-              <a:srgbClr val="FFFFFF"/>
-            </a:fillRef>
-            <a:effectRef idx="0">
-              <a:srgbClr val="FFFFFF"/>
-            </a:effectRef>
-            <a:fontRef idx="minor">
+              <a:latin typeface="宋体" panose="02010600030101010101" pitchFamily="2" charset="-122"/>
+              <a:ea typeface="宋体" panose="02010600030101010101" pitchFamily="2" charset="-122"/>
+              <a:cs typeface="宋体" panose="02010600030101010101" pitchFamily="2" charset="-122"/>
+            </a:endParaRPr>
+          </a:p>
+        </p:txBody>
+      </p:sp>
+      <p:cxnSp>
+        <p:nvCxnSpPr>
+          <p:cNvPr id="21" name="直接箭头连接符 20"/>
+          <p:cNvCxnSpPr/>
+          <p:nvPr/>
+        </p:nvCxnSpPr>
+        <p:spPr>
+          <a:xfrm>
+            <a:off x="5953760" y="567055"/>
+            <a:ext cx="1017905" cy="0"/>
+          </a:xfrm>
+          <a:prstGeom prst="straightConnector1">
+            <a:avLst/>
+          </a:prstGeom>
+          <a:ln w="19050">
+            <a:solidFill>
               <a:schemeClr val="tx1"/>
-            </a:fontRef>
-          </p:style>
-        </p:cxnSp>
-        <p:sp>
-          <p:nvSpPr>
-            <p:cNvPr id="25" name="文本框 24"/>
-            <p:cNvSpPr txBox="1"/>
-            <p:nvPr/>
-          </p:nvSpPr>
-          <p:spPr>
-            <a:xfrm>
-              <a:off x="9828" y="3031"/>
-              <a:ext cx="1855" cy="531"/>
-            </a:xfrm>
-            <a:prstGeom prst="rect">
-              <a:avLst/>
-            </a:prstGeom>
-            <a:noFill/>
-          </p:spPr>
-          <p:txBody>
-            <a:bodyPr wrap="square" rtlCol="0">
-              <a:spAutoFit/>
-            </a:bodyPr>
-            <a:p>
-              <a:r>
-                <a:rPr lang="zh-CN" altLang="en-US" sz="1600" b="1">
-                  <a:solidFill>
-                    <a:schemeClr val="tx1"/>
-                  </a:solidFill>
-                  <a:latin typeface="宋体" panose="02010600030101010101" pitchFamily="2" charset="-122"/>
-                  <a:ea typeface="宋体" panose="02010600030101010101" pitchFamily="2" charset="-122"/>
-                  <a:sym typeface="+mn-ea"/>
-                </a:rPr>
-                <a:t>投影变换</a:t>
-              </a:r>
-              <a:endParaRPr lang="zh-CN" altLang="en-US" sz="1600" b="1">
+            </a:solidFill>
+            <a:headEnd type="none"/>
+            <a:tailEnd type="triangle" w="med" len="med"/>
+          </a:ln>
+        </p:spPr>
+        <p:style>
+          <a:lnRef idx="2">
+            <a:schemeClr val="accent1"/>
+          </a:lnRef>
+          <a:fillRef idx="0">
+            <a:srgbClr val="FFFFFF"/>
+          </a:fillRef>
+          <a:effectRef idx="0">
+            <a:srgbClr val="FFFFFF"/>
+          </a:effectRef>
+          <a:fontRef idx="minor">
+            <a:schemeClr val="tx1"/>
+          </a:fontRef>
+        </p:style>
+      </p:cxnSp>
+      <p:sp>
+        <p:nvSpPr>
+          <p:cNvPr id="25" name="文本框 24"/>
+          <p:cNvSpPr txBox="1"/>
+          <p:nvPr/>
+        </p:nvSpPr>
+        <p:spPr>
+          <a:xfrm>
+            <a:off x="5932170" y="260350"/>
+            <a:ext cx="1177925" cy="337185"/>
+          </a:xfrm>
+          <a:prstGeom prst="rect">
+            <a:avLst/>
+          </a:prstGeom>
+          <a:noFill/>
+        </p:spPr>
+        <p:txBody>
+          <a:bodyPr wrap="square" rtlCol="0">
+            <a:spAutoFit/>
+          </a:bodyPr>
+          <a:p>
+            <a:r>
+              <a:rPr lang="zh-CN" altLang="en-US" sz="1600">
                 <a:solidFill>
                   <a:schemeClr val="tx1"/>
                 </a:solidFill>
                 <a:latin typeface="宋体" panose="02010600030101010101" pitchFamily="2" charset="-122"/>
                 <a:ea typeface="宋体" panose="02010600030101010101" pitchFamily="2" charset="-122"/>
                 <a:sym typeface="+mn-ea"/>
-              </a:endParaRPr>
-            </a:p>
-          </p:txBody>
-        </p:sp>
-        <p:sp>
-          <p:nvSpPr>
-            <p:cNvPr id="31" name="矩形 30"/>
-            <p:cNvSpPr/>
-            <p:nvPr/>
-          </p:nvSpPr>
-          <p:spPr>
-            <a:xfrm>
-              <a:off x="15271" y="3170"/>
-              <a:ext cx="2363" cy="687"/>
-            </a:xfrm>
-            <a:prstGeom prst="rect">
-              <a:avLst/>
-            </a:prstGeom>
-            <a:solidFill>
-              <a:srgbClr val="F7CAAB"/>
-            </a:solidFill>
-            <a:ln>
+              </a:rPr>
+              <a:t>投影变换</a:t>
+            </a:r>
+            <a:endParaRPr lang="zh-CN" altLang="en-US" sz="1600">
               <a:solidFill>
                 <a:schemeClr val="tx1"/>
               </a:solidFill>
-            </a:ln>
-          </p:spPr>
-          <p:style>
-            <a:lnRef idx="2">
-              <a:schemeClr val="accent1">
-                <a:lumMod val="75000"/>
-              </a:schemeClr>
-            </a:lnRef>
-            <a:fillRef idx="1">
-              <a:schemeClr val="accent1"/>
-            </a:fillRef>
-            <a:effectRef idx="0">
-              <a:srgbClr val="FFFFFF"/>
-            </a:effectRef>
-            <a:fontRef idx="minor">
-              <a:schemeClr val="lt1"/>
-            </a:fontRef>
-          </p:style>
-          <p:txBody>
-            <a:bodyPr rtlCol="0" anchor="ctr"/>
-            <a:p>
-              <a:pPr algn="ctr"/>
-              <a:r>
-                <a:rPr lang="zh-CN" altLang="en-US" sz="1600" b="1">
-                  <a:solidFill>
-                    <a:schemeClr val="tx1"/>
-                  </a:solidFill>
-                  <a:latin typeface="宋体" panose="02010600030101010101" pitchFamily="2" charset="-122"/>
-                  <a:ea typeface="宋体" panose="02010600030101010101" pitchFamily="2" charset="-122"/>
-                  <a:cs typeface="宋体" panose="02010600030101010101" pitchFamily="2" charset="-122"/>
-                  <a:sym typeface="+mn-ea"/>
-                </a:rPr>
-                <a:t>标准设备空间</a:t>
-              </a:r>
-              <a:endParaRPr lang="zh-CN" altLang="en-US" sz="1600" b="1">
+              <a:latin typeface="宋体" panose="02010600030101010101" pitchFamily="2" charset="-122"/>
+              <a:ea typeface="宋体" panose="02010600030101010101" pitchFamily="2" charset="-122"/>
+              <a:sym typeface="+mn-ea"/>
+            </a:endParaRPr>
+          </a:p>
+        </p:txBody>
+      </p:sp>
+      <p:sp>
+        <p:nvSpPr>
+          <p:cNvPr id="31" name="矩形 30"/>
+          <p:cNvSpPr/>
+          <p:nvPr/>
+        </p:nvSpPr>
+        <p:spPr>
+          <a:xfrm>
+            <a:off x="9389110" y="348615"/>
+            <a:ext cx="1500505" cy="436245"/>
+          </a:xfrm>
+          <a:prstGeom prst="rect">
+            <a:avLst/>
+          </a:prstGeom>
+          <a:solidFill>
+            <a:srgbClr val="F7CAAB"/>
+          </a:solidFill>
+          <a:ln>
+            <a:solidFill>
+              <a:schemeClr val="tx1"/>
+            </a:solidFill>
+          </a:ln>
+        </p:spPr>
+        <p:style>
+          <a:lnRef idx="2">
+            <a:schemeClr val="accent1">
+              <a:lumMod val="75000"/>
+            </a:schemeClr>
+          </a:lnRef>
+          <a:fillRef idx="1">
+            <a:schemeClr val="accent1"/>
+          </a:fillRef>
+          <a:effectRef idx="0">
+            <a:srgbClr val="FFFFFF"/>
+          </a:effectRef>
+          <a:fontRef idx="minor">
+            <a:schemeClr val="lt1"/>
+          </a:fontRef>
+        </p:style>
+        <p:txBody>
+          <a:bodyPr rtlCol="0" anchor="ctr"/>
+          <a:p>
+            <a:pPr algn="ctr"/>
+            <a:r>
+              <a:rPr lang="zh-CN" altLang="en-US" sz="1600">
                 <a:solidFill>
                   <a:schemeClr val="tx1"/>
                 </a:solidFill>
@@ -3559,146 +3534,146 @@
                 <a:ea typeface="宋体" panose="02010600030101010101" pitchFamily="2" charset="-122"/>
                 <a:cs typeface="宋体" panose="02010600030101010101" pitchFamily="2" charset="-122"/>
                 <a:sym typeface="+mn-ea"/>
-              </a:endParaRPr>
-            </a:p>
-          </p:txBody>
-        </p:sp>
-        <p:cxnSp>
-          <p:nvCxnSpPr>
-            <p:cNvPr id="32" name="直接箭头连接符 31"/>
-            <p:cNvCxnSpPr/>
-            <p:nvPr/>
-          </p:nvCxnSpPr>
-          <p:spPr>
-            <a:xfrm>
-              <a:off x="13726" y="3502"/>
-              <a:ext cx="1515" cy="12"/>
-            </a:xfrm>
-            <a:prstGeom prst="straightConnector1">
-              <a:avLst/>
-            </a:prstGeom>
-            <a:ln w="19050">
+              </a:rPr>
+              <a:t>标准设备空间</a:t>
+            </a:r>
+            <a:endParaRPr lang="zh-CN" altLang="en-US" sz="1600">
               <a:solidFill>
                 <a:schemeClr val="tx1"/>
               </a:solidFill>
-              <a:headEnd type="none"/>
-              <a:tailEnd type="triangle" w="med" len="med"/>
-            </a:ln>
-          </p:spPr>
-          <p:style>
-            <a:lnRef idx="2">
-              <a:schemeClr val="accent1"/>
-            </a:lnRef>
-            <a:fillRef idx="0">
-              <a:srgbClr val="FFFFFF"/>
-            </a:fillRef>
-            <a:effectRef idx="0">
-              <a:srgbClr val="FFFFFF"/>
-            </a:effectRef>
-            <a:fontRef idx="minor">
+              <a:latin typeface="宋体" panose="02010600030101010101" pitchFamily="2" charset="-122"/>
+              <a:ea typeface="宋体" panose="02010600030101010101" pitchFamily="2" charset="-122"/>
+              <a:cs typeface="宋体" panose="02010600030101010101" pitchFamily="2" charset="-122"/>
+              <a:sym typeface="+mn-ea"/>
+            </a:endParaRPr>
+          </a:p>
+        </p:txBody>
+      </p:sp>
+      <p:cxnSp>
+        <p:nvCxnSpPr>
+          <p:cNvPr id="32" name="直接箭头连接符 31"/>
+          <p:cNvCxnSpPr/>
+          <p:nvPr/>
+        </p:nvCxnSpPr>
+        <p:spPr>
+          <a:xfrm>
+            <a:off x="8408035" y="559435"/>
+            <a:ext cx="962025" cy="7620"/>
+          </a:xfrm>
+          <a:prstGeom prst="straightConnector1">
+            <a:avLst/>
+          </a:prstGeom>
+          <a:ln w="19050">
+            <a:solidFill>
               <a:schemeClr val="tx1"/>
-            </a:fontRef>
-          </p:style>
-        </p:cxnSp>
-        <p:sp>
-          <p:nvSpPr>
-            <p:cNvPr id="33" name="文本框 32"/>
-            <p:cNvSpPr txBox="1"/>
-            <p:nvPr/>
-          </p:nvSpPr>
-          <p:spPr>
-            <a:xfrm>
-              <a:off x="13701" y="2956"/>
-              <a:ext cx="1855" cy="531"/>
-            </a:xfrm>
-            <a:prstGeom prst="rect">
-              <a:avLst/>
-            </a:prstGeom>
-            <a:noFill/>
-          </p:spPr>
-          <p:txBody>
-            <a:bodyPr wrap="square" rtlCol="0">
-              <a:spAutoFit/>
-            </a:bodyPr>
-            <a:p>
-              <a:r>
-                <a:rPr lang="zh-CN" altLang="en-US" sz="1600" b="1">
-                  <a:solidFill>
-                    <a:schemeClr val="tx1"/>
-                  </a:solidFill>
-                  <a:latin typeface="宋体" panose="02010600030101010101" pitchFamily="2" charset="-122"/>
-                  <a:ea typeface="宋体" panose="02010600030101010101" pitchFamily="2" charset="-122"/>
-                  <a:sym typeface="+mn-ea"/>
-                </a:rPr>
-                <a:t>透视除法</a:t>
-              </a:r>
-              <a:endParaRPr lang="zh-CN" altLang="en-US" sz="1600" b="1">
+            </a:solidFill>
+            <a:headEnd type="none"/>
+            <a:tailEnd type="triangle" w="med" len="med"/>
+          </a:ln>
+        </p:spPr>
+        <p:style>
+          <a:lnRef idx="2">
+            <a:schemeClr val="accent1"/>
+          </a:lnRef>
+          <a:fillRef idx="0">
+            <a:srgbClr val="FFFFFF"/>
+          </a:fillRef>
+          <a:effectRef idx="0">
+            <a:srgbClr val="FFFFFF"/>
+          </a:effectRef>
+          <a:fontRef idx="minor">
+            <a:schemeClr val="tx1"/>
+          </a:fontRef>
+        </p:style>
+      </p:cxnSp>
+      <p:sp>
+        <p:nvSpPr>
+          <p:cNvPr id="33" name="文本框 32"/>
+          <p:cNvSpPr txBox="1"/>
+          <p:nvPr/>
+        </p:nvSpPr>
+        <p:spPr>
+          <a:xfrm>
+            <a:off x="8392160" y="212725"/>
+            <a:ext cx="1177925" cy="337185"/>
+          </a:xfrm>
+          <a:prstGeom prst="rect">
+            <a:avLst/>
+          </a:prstGeom>
+          <a:noFill/>
+        </p:spPr>
+        <p:txBody>
+          <a:bodyPr wrap="square" rtlCol="0">
+            <a:spAutoFit/>
+          </a:bodyPr>
+          <a:p>
+            <a:r>
+              <a:rPr lang="zh-CN" altLang="en-US" sz="1600">
                 <a:solidFill>
                   <a:schemeClr val="tx1"/>
                 </a:solidFill>
                 <a:latin typeface="宋体" panose="02010600030101010101" pitchFamily="2" charset="-122"/>
                 <a:ea typeface="宋体" panose="02010600030101010101" pitchFamily="2" charset="-122"/>
                 <a:sym typeface="+mn-ea"/>
-              </a:endParaRPr>
-            </a:p>
-          </p:txBody>
-        </p:sp>
-        <p:sp>
-          <p:nvSpPr>
-            <p:cNvPr id="42" name="矩形 41"/>
-            <p:cNvSpPr/>
-            <p:nvPr/>
-          </p:nvSpPr>
-          <p:spPr>
-            <a:xfrm>
-              <a:off x="15271" y="4904"/>
-              <a:ext cx="2363" cy="687"/>
-            </a:xfrm>
-            <a:prstGeom prst="rect">
-              <a:avLst/>
-            </a:prstGeom>
-            <a:solidFill>
-              <a:srgbClr val="F7CAAB"/>
-            </a:solidFill>
-            <a:ln>
+              </a:rPr>
+              <a:t>透视除法</a:t>
+            </a:r>
+            <a:endParaRPr lang="zh-CN" altLang="en-US" sz="1600">
               <a:solidFill>
                 <a:schemeClr val="tx1"/>
               </a:solidFill>
-            </a:ln>
-          </p:spPr>
-          <p:style>
-            <a:lnRef idx="2">
-              <a:schemeClr val="accent1">
-                <a:lumMod val="75000"/>
-              </a:schemeClr>
-            </a:lnRef>
-            <a:fillRef idx="1">
-              <a:schemeClr val="accent1"/>
-            </a:fillRef>
-            <a:effectRef idx="0">
-              <a:srgbClr val="FFFFFF"/>
-            </a:effectRef>
-            <a:fontRef idx="minor">
-              <a:schemeClr val="lt1"/>
-            </a:fontRef>
-          </p:style>
-          <p:txBody>
-            <a:bodyPr rtlCol="0" anchor="ctr"/>
-            <a:p>
-              <a:pPr algn="ctr"/>
-              <a:r>
-                <a:rPr lang="zh-CN" altLang="en-US" sz="1600" b="1">
-                  <a:solidFill>
-                    <a:schemeClr val="tx1"/>
-                  </a:solidFill>
-                  <a:latin typeface="宋体" panose="02010600030101010101" pitchFamily="2" charset="-122"/>
-                  <a:ea typeface="宋体" panose="02010600030101010101" pitchFamily="2" charset="-122"/>
-                  <a:cs typeface="宋体" panose="02010600030101010101" pitchFamily="2" charset="-122"/>
-                  <a:sym typeface="+mn-ea"/>
-                </a:rPr>
-                <a:t>屏幕空间</a:t>
-              </a:r>
-              <a:endParaRPr lang="zh-CN" altLang="en-US" sz="1600" b="1">
+              <a:latin typeface="宋体" panose="02010600030101010101" pitchFamily="2" charset="-122"/>
+              <a:ea typeface="宋体" panose="02010600030101010101" pitchFamily="2" charset="-122"/>
+              <a:sym typeface="+mn-ea"/>
+            </a:endParaRPr>
+          </a:p>
+        </p:txBody>
+      </p:sp>
+      <p:sp>
+        <p:nvSpPr>
+          <p:cNvPr id="42" name="矩形 41"/>
+          <p:cNvSpPr/>
+          <p:nvPr/>
+        </p:nvSpPr>
+        <p:spPr>
+          <a:xfrm>
+            <a:off x="9389110" y="1449705"/>
+            <a:ext cx="1500505" cy="436245"/>
+          </a:xfrm>
+          <a:prstGeom prst="rect">
+            <a:avLst/>
+          </a:prstGeom>
+          <a:solidFill>
+            <a:srgbClr val="F7CAAB"/>
+          </a:solidFill>
+          <a:ln>
+            <a:solidFill>
+              <a:schemeClr val="tx1"/>
+            </a:solidFill>
+          </a:ln>
+        </p:spPr>
+        <p:style>
+          <a:lnRef idx="2">
+            <a:schemeClr val="accent1">
+              <a:lumMod val="75000"/>
+            </a:schemeClr>
+          </a:lnRef>
+          <a:fillRef idx="1">
+            <a:schemeClr val="accent1"/>
+          </a:fillRef>
+          <a:effectRef idx="0">
+            <a:srgbClr val="FFFFFF"/>
+          </a:effectRef>
+          <a:fontRef idx="minor">
+            <a:schemeClr val="lt1"/>
+          </a:fontRef>
+        </p:style>
+        <p:txBody>
+          <a:bodyPr rtlCol="0" anchor="ctr"/>
+          <a:p>
+            <a:pPr algn="ctr"/>
+            <a:r>
+              <a:rPr lang="zh-CN" altLang="en-US" sz="1600">
                 <a:solidFill>
                   <a:schemeClr val="tx1"/>
                 </a:solidFill>
@@ -3706,94 +3681,104 @@
                 <a:ea typeface="宋体" panose="02010600030101010101" pitchFamily="2" charset="-122"/>
                 <a:cs typeface="宋体" panose="02010600030101010101" pitchFamily="2" charset="-122"/>
                 <a:sym typeface="+mn-ea"/>
-              </a:endParaRPr>
-            </a:p>
-          </p:txBody>
-        </p:sp>
-        <p:cxnSp>
-          <p:nvCxnSpPr>
-            <p:cNvPr id="44" name="直接箭头连接符 43"/>
-            <p:cNvCxnSpPr>
-              <a:stCxn id="31" idx="2"/>
-              <a:endCxn id="42" idx="0"/>
-            </p:cNvCxnSpPr>
-            <p:nvPr/>
-          </p:nvCxnSpPr>
-          <p:spPr>
-            <a:xfrm>
-              <a:off x="16453" y="3857"/>
-              <a:ext cx="0" cy="1047"/>
-            </a:xfrm>
-            <a:prstGeom prst="straightConnector1">
-              <a:avLst/>
-            </a:prstGeom>
-            <a:ln w="19050">
+              </a:rPr>
+              <a:t>屏幕空间</a:t>
+            </a:r>
+            <a:endParaRPr lang="zh-CN" altLang="en-US" sz="1600">
               <a:solidFill>
                 <a:schemeClr val="tx1"/>
               </a:solidFill>
-              <a:headEnd type="none"/>
-              <a:tailEnd type="triangle" w="med" len="med"/>
-            </a:ln>
-          </p:spPr>
-          <p:style>
-            <a:lnRef idx="2">
-              <a:schemeClr val="accent1"/>
-            </a:lnRef>
-            <a:fillRef idx="0">
-              <a:srgbClr val="FFFFFF"/>
-            </a:fillRef>
-            <a:effectRef idx="0">
-              <a:srgbClr val="FFFFFF"/>
-            </a:effectRef>
-            <a:fontRef idx="minor">
+              <a:latin typeface="宋体" panose="02010600030101010101" pitchFamily="2" charset="-122"/>
+              <a:ea typeface="宋体" panose="02010600030101010101" pitchFamily="2" charset="-122"/>
+              <a:cs typeface="宋体" panose="02010600030101010101" pitchFamily="2" charset="-122"/>
+              <a:sym typeface="+mn-ea"/>
+            </a:endParaRPr>
+          </a:p>
+        </p:txBody>
+      </p:sp>
+      <p:cxnSp>
+        <p:nvCxnSpPr>
+          <p:cNvPr id="44" name="直接箭头连接符 43"/>
+          <p:cNvCxnSpPr>
+            <a:stCxn id="31" idx="2"/>
+            <a:endCxn id="42" idx="0"/>
+          </p:cNvCxnSpPr>
+          <p:nvPr/>
+        </p:nvCxnSpPr>
+        <p:spPr>
+          <a:xfrm>
+            <a:off x="10140315" y="784860"/>
+            <a:ext cx="0" cy="664845"/>
+          </a:xfrm>
+          <a:prstGeom prst="straightConnector1">
+            <a:avLst/>
+          </a:prstGeom>
+          <a:ln w="19050">
+            <a:solidFill>
               <a:schemeClr val="tx1"/>
-            </a:fontRef>
-          </p:style>
-        </p:cxnSp>
-        <p:sp>
-          <p:nvSpPr>
-            <p:cNvPr id="45" name="文本框 44"/>
-            <p:cNvSpPr txBox="1"/>
-            <p:nvPr/>
-          </p:nvSpPr>
-          <p:spPr>
-            <a:xfrm>
-              <a:off x="14913" y="4115"/>
-              <a:ext cx="1855" cy="531"/>
-            </a:xfrm>
-            <a:prstGeom prst="rect">
-              <a:avLst/>
-            </a:prstGeom>
-            <a:noFill/>
-          </p:spPr>
-          <p:txBody>
-            <a:bodyPr wrap="square" rtlCol="0">
-              <a:spAutoFit/>
-            </a:bodyPr>
-            <a:p>
-              <a:r>
-                <a:rPr lang="zh-CN" altLang="en-US" sz="1600" b="1">
-                  <a:solidFill>
-                    <a:schemeClr val="tx1"/>
-                  </a:solidFill>
-                  <a:latin typeface="宋体" panose="02010600030101010101" pitchFamily="2" charset="-122"/>
-                  <a:ea typeface="宋体" panose="02010600030101010101" pitchFamily="2" charset="-122"/>
-                  <a:sym typeface="+mn-ea"/>
-                </a:rPr>
-                <a:t>视口变换</a:t>
-              </a:r>
-              <a:endParaRPr lang="zh-CN" altLang="en-US" sz="1600" b="1">
+            </a:solidFill>
+            <a:headEnd type="none"/>
+            <a:tailEnd type="triangle" w="med" len="med"/>
+          </a:ln>
+        </p:spPr>
+        <p:style>
+          <a:lnRef idx="2">
+            <a:schemeClr val="accent1"/>
+          </a:lnRef>
+          <a:fillRef idx="0">
+            <a:srgbClr val="FFFFFF"/>
+          </a:fillRef>
+          <a:effectRef idx="0">
+            <a:srgbClr val="FFFFFF"/>
+          </a:effectRef>
+          <a:fontRef idx="minor">
+            <a:schemeClr val="tx1"/>
+          </a:fontRef>
+        </p:style>
+      </p:cxnSp>
+      <p:sp>
+        <p:nvSpPr>
+          <p:cNvPr id="45" name="文本框 44"/>
+          <p:cNvSpPr txBox="1"/>
+          <p:nvPr/>
+        </p:nvSpPr>
+        <p:spPr>
+          <a:xfrm>
+            <a:off x="9161780" y="948690"/>
+            <a:ext cx="1177925" cy="337185"/>
+          </a:xfrm>
+          <a:prstGeom prst="rect">
+            <a:avLst/>
+          </a:prstGeom>
+          <a:noFill/>
+        </p:spPr>
+        <p:txBody>
+          <a:bodyPr wrap="square" rtlCol="0">
+            <a:spAutoFit/>
+          </a:bodyPr>
+          <a:p>
+            <a:r>
+              <a:rPr lang="zh-CN" altLang="en-US" sz="1600">
                 <a:solidFill>
                   <a:schemeClr val="tx1"/>
                 </a:solidFill>
                 <a:latin typeface="宋体" panose="02010600030101010101" pitchFamily="2" charset="-122"/>
                 <a:ea typeface="宋体" panose="02010600030101010101" pitchFamily="2" charset="-122"/>
                 <a:sym typeface="+mn-ea"/>
-              </a:endParaRPr>
-            </a:p>
-          </p:txBody>
-        </p:sp>
-      </p:grpSp>
+              </a:rPr>
+              <a:t>视口变换</a:t>
+            </a:r>
+            <a:endParaRPr lang="zh-CN" altLang="en-US" sz="1600">
+              <a:solidFill>
+                <a:schemeClr val="tx1"/>
+              </a:solidFill>
+              <a:latin typeface="宋体" panose="02010600030101010101" pitchFamily="2" charset="-122"/>
+              <a:ea typeface="宋体" panose="02010600030101010101" pitchFamily="2" charset="-122"/>
+              <a:sym typeface="+mn-ea"/>
+            </a:endParaRPr>
+          </a:p>
+        </p:txBody>
+      </p:sp>
     </p:spTree>
   </p:cSld>
   <p:clrMapOvr>
